--- a/Financial_Impact_Portfolio_Thomas_McCoy.pptx
+++ b/Financial_Impact_Portfolio_Thomas_McCoy.pptx
@@ -10401,7 +10401,7 @@
                 <a:ea typeface="Calibri" pitchFamily="34" charset="-122"/>
                 <a:cs typeface="Calibri" pitchFamily="34" charset="-120"/>
               </a:rPr>
-              <a:t>CPA Candidate — Pennsylvania pathway</a:t>
+              <a:t>CPA Pathway — advancing toward licensure</a:t>
             </a:r>
             <a:pPr indent="0" marL="0">
               <a:buNone/>
@@ -10457,7 +10457,7 @@
                 <a:ea typeface="Calibri" pitchFamily="34" charset="-122"/>
                 <a:cs typeface="Calibri" pitchFamily="34" charset="-120"/>
               </a:rPr>
-              <a:t>Deloitte FastTrack Sales Course</a:t>
+              <a:t>Northwestern Mutual FastTrack Sales Course</a:t>
             </a:r>
             <a:endParaRPr lang="en-US" sz="1150" dirty="0"/>
           </a:p>
@@ -11096,7 +11096,7 @@
                 <a:ea typeface="Calibri" pitchFamily="34" charset="-122"/>
                 <a:cs typeface="Calibri" pitchFamily="34" charset="-120"/>
               </a:rPr>
-              <a:t>Delivered financial planning services  ·  earned Life &amp; Health Insurance license  ·  completed FastTrack Sales Course.</a:t>
+              <a:t>Delivered financial planning services  ·  earned Life &amp; Health Insurance license  ·  completed Northwestern Mutual's FastTrack Sales Course.</a:t>
             </a:r>
             <a:endParaRPr lang="en-US" sz="1000" dirty="0"/>
           </a:p>
